--- a/documents/presentation.pptx
+++ b/documents/presentation.pptx
@@ -3060,7 +3060,7 @@
           <a:p>
             <a:fld id="{22068F91-9CF3-42D3-B29F-24C7426D284D}" type="datetimeFigureOut">
               <a:rPr lang="ko-KR" altLang="en-US" smtClean="0"/>
-              <a:t>2025-11-25</a:t>
+              <a:t>2025-11-28</a:t>
             </a:fld>
             <a:endParaRPr lang="ko-KR" altLang="en-US"/>
           </a:p>
@@ -3666,7 +3666,7 @@
           <a:p>
             <a:fld id="{AF1D1FDC-36CD-49E0-AE8F-88A452F8C127}" type="datetimeFigureOut">
               <a:rPr lang="ko-KR" altLang="en-US" smtClean="0"/>
-              <a:t>2025-11-25</a:t>
+              <a:t>2025-11-28</a:t>
             </a:fld>
             <a:endParaRPr lang="ko-KR" altLang="en-US"/>
           </a:p>
@@ -3864,7 +3864,7 @@
           <a:p>
             <a:fld id="{AF1D1FDC-36CD-49E0-AE8F-88A452F8C127}" type="datetimeFigureOut">
               <a:rPr lang="ko-KR" altLang="en-US" smtClean="0"/>
-              <a:t>2025-11-25</a:t>
+              <a:t>2025-11-28</a:t>
             </a:fld>
             <a:endParaRPr lang="ko-KR" altLang="en-US"/>
           </a:p>
@@ -4072,7 +4072,7 @@
           <a:p>
             <a:fld id="{AF1D1FDC-36CD-49E0-AE8F-88A452F8C127}" type="datetimeFigureOut">
               <a:rPr lang="ko-KR" altLang="en-US" smtClean="0"/>
-              <a:t>2025-11-25</a:t>
+              <a:t>2025-11-28</a:t>
             </a:fld>
             <a:endParaRPr lang="ko-KR" altLang="en-US"/>
           </a:p>
@@ -4270,7 +4270,7 @@
           <a:p>
             <a:fld id="{AF1D1FDC-36CD-49E0-AE8F-88A452F8C127}" type="datetimeFigureOut">
               <a:rPr lang="ko-KR" altLang="en-US" smtClean="0"/>
-              <a:t>2025-11-25</a:t>
+              <a:t>2025-11-28</a:t>
             </a:fld>
             <a:endParaRPr lang="ko-KR" altLang="en-US"/>
           </a:p>
@@ -4545,7 +4545,7 @@
           <a:p>
             <a:fld id="{AF1D1FDC-36CD-49E0-AE8F-88A452F8C127}" type="datetimeFigureOut">
               <a:rPr lang="ko-KR" altLang="en-US" smtClean="0"/>
-              <a:t>2025-11-25</a:t>
+              <a:t>2025-11-28</a:t>
             </a:fld>
             <a:endParaRPr lang="ko-KR" altLang="en-US"/>
           </a:p>
@@ -4810,7 +4810,7 @@
           <a:p>
             <a:fld id="{AF1D1FDC-36CD-49E0-AE8F-88A452F8C127}" type="datetimeFigureOut">
               <a:rPr lang="ko-KR" altLang="en-US" smtClean="0"/>
-              <a:t>2025-11-25</a:t>
+              <a:t>2025-11-28</a:t>
             </a:fld>
             <a:endParaRPr lang="ko-KR" altLang="en-US"/>
           </a:p>
@@ -5222,7 +5222,7 @@
           <a:p>
             <a:fld id="{AF1D1FDC-36CD-49E0-AE8F-88A452F8C127}" type="datetimeFigureOut">
               <a:rPr lang="ko-KR" altLang="en-US" smtClean="0"/>
-              <a:t>2025-11-25</a:t>
+              <a:t>2025-11-28</a:t>
             </a:fld>
             <a:endParaRPr lang="ko-KR" altLang="en-US"/>
           </a:p>
@@ -5363,7 +5363,7 @@
           <a:p>
             <a:fld id="{AF1D1FDC-36CD-49E0-AE8F-88A452F8C127}" type="datetimeFigureOut">
               <a:rPr lang="ko-KR" altLang="en-US" smtClean="0"/>
-              <a:t>2025-11-25</a:t>
+              <a:t>2025-11-28</a:t>
             </a:fld>
             <a:endParaRPr lang="ko-KR" altLang="en-US"/>
           </a:p>
@@ -5476,7 +5476,7 @@
           <a:p>
             <a:fld id="{AF1D1FDC-36CD-49E0-AE8F-88A452F8C127}" type="datetimeFigureOut">
               <a:rPr lang="ko-KR" altLang="en-US" smtClean="0"/>
-              <a:t>2025-11-25</a:t>
+              <a:t>2025-11-28</a:t>
             </a:fld>
             <a:endParaRPr lang="ko-KR" altLang="en-US"/>
           </a:p>
@@ -5787,7 +5787,7 @@
           <a:p>
             <a:fld id="{AF1D1FDC-36CD-49E0-AE8F-88A452F8C127}" type="datetimeFigureOut">
               <a:rPr lang="ko-KR" altLang="en-US" smtClean="0"/>
-              <a:t>2025-11-25</a:t>
+              <a:t>2025-11-28</a:t>
             </a:fld>
             <a:endParaRPr lang="ko-KR" altLang="en-US"/>
           </a:p>
@@ -6075,7 +6075,7 @@
           <a:p>
             <a:fld id="{AF1D1FDC-36CD-49E0-AE8F-88A452F8C127}" type="datetimeFigureOut">
               <a:rPr lang="ko-KR" altLang="en-US" smtClean="0"/>
-              <a:t>2025-11-25</a:t>
+              <a:t>2025-11-28</a:t>
             </a:fld>
             <a:endParaRPr lang="ko-KR" altLang="en-US"/>
           </a:p>
@@ -6370,7 +6370,7 @@
           <a:p>
             <a:fld id="{AF1D1FDC-36CD-49E0-AE8F-88A452F8C127}" type="datetimeFigureOut">
               <a:rPr lang="ko-KR" altLang="en-US" smtClean="0"/>
-              <a:t>2025-11-25</a:t>
+              <a:t>2025-11-28</a:t>
             </a:fld>
             <a:endParaRPr lang="ko-KR" altLang="en-US"/>
           </a:p>
@@ -32587,7 +32587,7 @@
           <a:lstStyle/>
           <a:p>
             <a:pPr algn="ctr"/>
-            <a:endParaRPr lang="ko-KR" altLang="en-US"/>
+            <a:endParaRPr lang="ko-KR" altLang="en-US" dirty="0"/>
           </a:p>
         </p:txBody>
       </p:sp>
@@ -32829,6 +32829,114 @@
           </a:p>
         </p:txBody>
       </p:sp>
+      <p:pic>
+        <p:nvPicPr>
+          <p:cNvPr id="1026" name="Picture 2" descr="Contrast adjustment ">
+            <a:extLst>
+              <a:ext uri="{FF2B5EF4-FFF2-40B4-BE49-F238E27FC236}">
+                <a16:creationId xmlns:a16="http://schemas.microsoft.com/office/drawing/2014/main" id="{BFCDB9A5-9E47-7DC2-E5FC-6D380CD50838}"/>
+              </a:ext>
+            </a:extLst>
+          </p:cNvPr>
+          <p:cNvPicPr>
+            <a:picLocks noChangeAspect="1" noChangeArrowheads="1"/>
+          </p:cNvPicPr>
+          <p:nvPr/>
+        </p:nvPicPr>
+        <p:blipFill>
+          <a:blip r:embed="rId2">
+            <a:duotone>
+              <a:schemeClr val="accent1">
+                <a:shade val="45000"/>
+                <a:satMod val="135000"/>
+              </a:schemeClr>
+              <a:prstClr val="white"/>
+            </a:duotone>
+            <a:extLst>
+              <a:ext uri="{28A0092B-C50C-407E-A947-70E740481C1C}">
+                <a14:useLocalDpi xmlns:a14="http://schemas.microsoft.com/office/drawing/2010/main" val="0"/>
+              </a:ext>
+            </a:extLst>
+          </a:blip>
+          <a:srcRect/>
+          <a:stretch>
+            <a:fillRect/>
+          </a:stretch>
+        </p:blipFill>
+        <p:spPr bwMode="auto">
+          <a:xfrm>
+            <a:off x="2510117" y="2888876"/>
+            <a:ext cx="1080247" cy="1080247"/>
+          </a:xfrm>
+          <a:prstGeom prst="rect">
+            <a:avLst/>
+          </a:prstGeom>
+          <a:noFill/>
+          <a:extLst>
+            <a:ext uri="{909E8E84-426E-40DD-AFC4-6F175D3DCCD1}">
+              <a14:hiddenFill xmlns:a14="http://schemas.microsoft.com/office/drawing/2010/main">
+                <a:solidFill>
+                  <a:srgbClr val="FFFFFF"/>
+                </a:solidFill>
+              </a14:hiddenFill>
+            </a:ext>
+          </a:extLst>
+        </p:spPr>
+      </p:pic>
+      <p:pic>
+        <p:nvPicPr>
+          <p:cNvPr id="1028" name="Picture 4" descr="Paper ">
+            <a:extLst>
+              <a:ext uri="{FF2B5EF4-FFF2-40B4-BE49-F238E27FC236}">
+                <a16:creationId xmlns:a16="http://schemas.microsoft.com/office/drawing/2014/main" id="{F34A53A8-30D1-B0FB-5613-DE46109B9D46}"/>
+              </a:ext>
+            </a:extLst>
+          </p:cNvPr>
+          <p:cNvPicPr>
+            <a:picLocks noChangeAspect="1" noChangeArrowheads="1"/>
+          </p:cNvPicPr>
+          <p:nvPr/>
+        </p:nvPicPr>
+        <p:blipFill>
+          <a:blip r:embed="rId3">
+            <a:duotone>
+              <a:schemeClr val="accent1">
+                <a:shade val="45000"/>
+                <a:satMod val="135000"/>
+              </a:schemeClr>
+              <a:prstClr val="white"/>
+            </a:duotone>
+            <a:extLst>
+              <a:ext uri="{28A0092B-C50C-407E-A947-70E740481C1C}">
+                <a14:useLocalDpi xmlns:a14="http://schemas.microsoft.com/office/drawing/2010/main" val="0"/>
+              </a:ext>
+            </a:extLst>
+          </a:blip>
+          <a:srcRect/>
+          <a:stretch>
+            <a:fillRect/>
+          </a:stretch>
+        </p:blipFill>
+        <p:spPr bwMode="auto">
+          <a:xfrm>
+            <a:off x="8601883" y="2888876"/>
+            <a:ext cx="1080000" cy="1080000"/>
+          </a:xfrm>
+          <a:prstGeom prst="rect">
+            <a:avLst/>
+          </a:prstGeom>
+          <a:noFill/>
+          <a:extLst>
+            <a:ext uri="{909E8E84-426E-40DD-AFC4-6F175D3DCCD1}">
+              <a14:hiddenFill xmlns:a14="http://schemas.microsoft.com/office/drawing/2010/main">
+                <a:solidFill>
+                  <a:srgbClr val="FFFFFF"/>
+                </a:solidFill>
+              </a14:hiddenFill>
+            </a:ext>
+          </a:extLst>
+        </p:spPr>
+      </p:pic>
     </p:spTree>
     <p:extLst>
       <p:ext uri="{BB962C8B-B14F-4D97-AF65-F5344CB8AC3E}">
